--- a/projets/rh_analytics/powerbi/TelcomCI_RH_Dashboard_Mockup 0.pptx
+++ b/projets/rh_analytics/powerbi/TelcomCI_RH_Dashboard_Mockup 0.pptx
@@ -1383,6 +1383,17 @@
               <a:buNone/>
             </a:pPr>
             <a:r>
+              <a:rPr lang="en-US" sz="5400" dirty="0" err="1">
+                <a:solidFill>
+                  <a:srgbClr val="F9A05A"/>
+                </a:solidFill>
+                <a:latin typeface="Calibri" pitchFamily="34" charset="0"/>
+                <a:ea typeface="Calibri" pitchFamily="34" charset="-122"/>
+                <a:cs typeface="Calibri" pitchFamily="34" charset="-120"/>
+              </a:rPr>
+              <a:t>Salariale</a:t>
+            </a:r>
+            <a:r>
               <a:rPr lang="en-US" sz="5400" dirty="0">
                 <a:solidFill>
                   <a:srgbClr val="F9A05A"/>
@@ -1391,7 +1402,7 @@
                 <a:ea typeface="Calibri" pitchFamily="34" charset="-122"/>
                 <a:cs typeface="Calibri" pitchFamily="34" charset="-120"/>
               </a:rPr>
-              <a:t>Salariale Analytics</a:t>
+              <a:t> Analytics</a:t>
             </a:r>
             <a:endParaRPr lang="en-US" sz="5400" dirty="0"/>
           </a:p>
@@ -12879,7 +12890,7 @@
         </p:nvSpPr>
         <p:spPr>
           <a:xfrm>
-            <a:off x="4462272" y="2176272"/>
+            <a:off x="5285232" y="1972346"/>
             <a:ext cx="640080" cy="164592"/>
           </a:xfrm>
           <a:prstGeom prst="rect">
@@ -14337,7 +14348,7 @@
         </p:nvSpPr>
         <p:spPr>
           <a:xfrm>
-            <a:off x="6144768" y="2231136"/>
+            <a:off x="6174232" y="2240280"/>
             <a:ext cx="1170432" cy="182880"/>
           </a:xfrm>
           <a:prstGeom prst="rect">
@@ -27562,8 +27573,8 @@
         </p:nvSpPr>
         <p:spPr>
           <a:xfrm>
-            <a:off x="4169664" y="2267712"/>
-            <a:ext cx="1005840" cy="329184"/>
+            <a:off x="4555552" y="2185416"/>
+            <a:ext cx="1587376" cy="329184"/>
           </a:xfrm>
           <a:prstGeom prst="rect">
             <a:avLst/>
@@ -27618,7 +27629,7 @@
         </p:nvSpPr>
         <p:spPr>
           <a:xfrm>
-            <a:off x="4169664" y="2578608"/>
+            <a:off x="4600449" y="2505456"/>
             <a:ext cx="457200" cy="201168"/>
           </a:xfrm>
           <a:prstGeom prst="rect">
